--- a/decks/hist-mughal-india/hist-mughal-india_ch4_greatness.pptx
+++ b/decks/hist-mughal-india/hist-mughal-india_ch4_greatness.pptx
@@ -127,30 +127,30 @@
   <p:extLst>
     <p:ext uri="{521415D9-36F7-43E2-AB2F-B90AF26B5E84}">
       <p14:sectionLst xmlns:p14="http://schemas.microsoft.com/office/powerpoint/2010/main">
-        <p14:section name="Opening" id="{ef6de2c3-21be-dbdb-f2e9-69c960a83337}">
+        <p14:section name="Opening" id="{9067092e-66e0-0d5d-a2b7-2e2e7b081d5f}">
           <p14:sldIdLst>
             <p14:sldId id="256"/>
           </p14:sldIdLst>
         </p14:section>
-        <p14:section name="Gate" id="{02e303e2-9095-631c-e3f1-ad26f4b8ad9e}">
+        <p14:section name="Gate" id="{f8814fdf-6ee5-bcb5-83bd-c3bdfacedd0f}">
           <p14:sldIdLst>
             <p14:sldId id="257"/>
             <p14:sldId id="258"/>
           </p14:sldIdLst>
         </p14:section>
-        <p14:section name="Pre-teach" id="{22b55cbe-3984-2a47-e693-627f4fe03d19}">
+        <p14:section name="Pre-teach" id="{b8543371-e51a-e449-3450-226b311f311b}">
           <p14:sldIdLst>
             <p14:sldId id="259"/>
             <p14:sldId id="260"/>
           </p14:sldIdLst>
         </p14:section>
-        <p14:section name="Read-along" id="{254adc1d-cd35-d6c5-14e1-5ab928d6eb7b}">
+        <p14:section name="Read-along" id="{700a637a-def9-271c-b4c5-cd1395874679}">
           <p14:sldIdLst>
             <p14:sldId id="261"/>
             <p14:sldId id="262"/>
           </p14:sldIdLst>
         </p14:section>
-        <p14:section name="Teach" id="{0bb7fbbd-0f27-7787-778f-38ca06f9a9b5}">
+        <p14:section name="Teach" id="{067fa2c4-ab69-c596-5aa2-77845d8c3a14}">
           <p14:sldIdLst>
             <p14:sldId id="263"/>
             <p14:sldId id="264"/>
@@ -160,7 +160,7 @@
             <p14:sldId id="268"/>
           </p14:sldIdLst>
         </p14:section>
-        <p14:section name="Routes" id="{98559a6b-7034-e147-8b62-b413a099f7ab}">
+        <p14:section name="Routes" id="{eed1d4b9-e9c2-a079-cf5f-f16c471a7fe8}">
           <p14:sldIdLst>
             <p14:sldId id="269"/>
             <p14:sldId id="270"/>
@@ -168,12 +168,12 @@
             <p14:sldId id="272"/>
           </p14:sldIdLst>
         </p14:section>
-        <p14:section name="Close" id="{dd97c484-cc51-3ba0-6b17-def50465eed6}">
+        <p14:section name="Close" id="{6970f8fd-3674-a301-1a60-849b9935661a}">
           <p14:sldIdLst>
             <p14:sldId id="273"/>
           </p14:sldIdLst>
         </p14:section>
-        <p14:section name="Answers" id="{1de8fd88-f03d-508e-aaa9-3aefa561c1d7}">
+        <p14:section name="Answers" id="{a1415491-62d2-2a2d-9c9f-a343c2b25a1e}">
           <p14:sldIdLst>
             <p14:sldId id="274"/>
             <p14:sldId id="275"/>
@@ -863,7 +863,7 @@
               <a:rPr lang="en-US" dirty="0"/>
               <a:t>Teach — Rulers, government and religion. Say it in your own words, then check understanding with a quick question: ask a pupil from the pre-teach group first, since they met these words and ideas before the lesson. Pupils try to recall before you re-explain.
 An empire needs more than an army. The Mughals were known for good government. Akbar set up a system for collecting tax and excellent communication across his lands, so the Empire became rich and the emperor's orders reached every province. He was helped by the Navratnas, the nine jewels: a group of nine talented advisers who helped him rule.
-Religion was a success too, at least under Akbar. He welcomed all faiths and promoted Hindus to positions of power in the government. This meant the views of the whole population were taken into account when decisions were made, not just the views of the Muslim rulers, and it brought a long period of peace and harmony.
+Religion was a success too, at least under Akbar. He welcomed all faiths and promoted Hindus to positions of power in the government. This meant decisions were made with the whole population in view, and not only with the Muslim rulers at the top, and it brought a long period of peace and harmony.
 Aurangzeb shows the other side. He is remembered very positively by some, as a strong and devout ruler who made the Empire its largest, and very negatively by others, for his intolerance. When you use the factor of rulers, say which ruler you mean.
 Tip: Akbar is your best example for government AND religion. Name him, name the Navratnas, name the tax system.</a:t>
             </a:r>
